--- a/decks/geog-tectonics/geog-tectonics_ch2_moving-plates.pptx
+++ b/decks/geog-tectonics/geog-tectonics_ch2_moving-plates.pptx
@@ -124,29 +124,29 @@
   <p:extLst>
     <p:ext uri="{521415D9-36F7-43E2-AB2F-B90AF26B5E84}">
       <p14:sectionLst xmlns:p14="http://schemas.microsoft.com/office/powerpoint/2010/main">
-        <p14:section name="Opening" id="{3c937ed4-b78b-34fb-a643-47ec85f5fc84}">
+        <p14:section name="Opening" id="{16651fc7-015c-7786-9344-d9460651fba0}">
           <p14:sldIdLst>
             <p14:sldId id="256"/>
           </p14:sldIdLst>
         </p14:section>
-        <p14:section name="Gate" id="{57013a37-89df-d690-686c-897a12f67f33}">
+        <p14:section name="Gate" id="{18bc7173-2c79-7e2d-4228-088e60f559cd}">
           <p14:sldIdLst>
             <p14:sldId id="257"/>
             <p14:sldId id="258"/>
           </p14:sldIdLst>
         </p14:section>
-        <p14:section name="Pre-teach" id="{2cfa64f6-8320-2b1c-79b8-b9852b9589de}">
+        <p14:section name="Pre-teach" id="{ef905b8b-146d-de36-cdcc-0ab56d984953}">
           <p14:sldIdLst>
             <p14:sldId id="259"/>
           </p14:sldIdLst>
         </p14:section>
-        <p14:section name="Read-along" id="{eaac555f-a96d-eb3a-81f3-3a2fbc067242}">
+        <p14:section name="Read-along" id="{984c87a0-c2d0-0784-ac13-16b8a59fc3d6}">
           <p14:sldIdLst>
             <p14:sldId id="260"/>
             <p14:sldId id="261"/>
           </p14:sldIdLst>
         </p14:section>
-        <p14:section name="Teach" id="{9fe89766-9567-eed3-a520-cc475052f292}">
+        <p14:section name="Teach" id="{ad027fa5-9f0a-66bb-4098-d1048fba9bbc}">
           <p14:sldIdLst>
             <p14:sldId id="262"/>
             <p14:sldId id="263"/>
@@ -154,7 +154,7 @@
             <p14:sldId id="265"/>
           </p14:sldIdLst>
         </p14:section>
-        <p14:section name="Routes" id="{bd45b61d-b18d-9e47-3554-ca18edf2e661}">
+        <p14:section name="Routes" id="{b43f46e8-158f-5eaa-84aa-b803fe194f08}">
           <p14:sldIdLst>
             <p14:sldId id="266"/>
             <p14:sldId id="267"/>
@@ -162,12 +162,12 @@
             <p14:sldId id="269"/>
           </p14:sldIdLst>
         </p14:section>
-        <p14:section name="Close" id="{2958ea6a-854a-1751-a35e-5fc267d7d83f}">
+        <p14:section name="Close" id="{efcc44bd-7b10-bae6-09b7-74da7c34d209}">
           <p14:sldIdLst>
             <p14:sldId id="270"/>
           </p14:sldIdLst>
         </p14:section>
-        <p14:section name="Answers" id="{519ee697-5074-a9f6-530c-3fd7fb7e3a2a}">
+        <p14:section name="Answers" id="{85a4d0e1-cf19-b3ff-46b7-5c7f3e8706d7}">
           <p14:sldIdLst>
             <p14:sldId id="271"/>
             <p14:sldId id="272"/>
@@ -1139,7 +1139,7 @@
               <a:rPr lang="en-US" dirty="0"/>
               <a:t>Exit ticket — individual, silent, on a slip or mini-whiteboard. Recall before help: no notes, no lanes, no hints. Collect before pupils leave.
 Question: Where do nearly all of the world's earthquakes and volcanoes happen?
-Answer: A   Along plate boundaries, where two plates meet. Earthquakes and volcanoes are caused by plates moving against each other, which only happens where plates meet, so they line up along plate boundaries.
+Answer: B   Along plate boundaries, where two plates meet. Earthquakes and volcanoes are caused by plates moving against each other, which only happens where plates meet, so they line up along plate boundaries.
 Source of this question: module 3 task ("Where the hazards are") from the manifest.
 Sort the slips: correct → ready to move on; incorrect → start next lesson in the pre-teach group, with the read-along and the Support lane. Same destination next time.</a:t>
             </a:r>
@@ -1412,7 +1412,7 @@
             <a:r>
               <a:rPr lang="en-US" dirty="0"/>
               <a:t>Answers — exit ticket: Exit ticket. Reveal the answer; pupils mark their own work in a different colour, then read the "why" together. Same destination for every lane, so one answer serves the whole class.
-Answer: A   Along plate boundaries, where two plates meet
+Answer: B   Along plate boundaries, where two plates meet
 Why: Earthquakes and volcanoes are caused by plates moving against each other, which only happens where plates meet, so they line up along plate boundaries.
 Ask a Support pupil to explain one step, and a Stretch pupil to share their extension.</a:t>
             </a:r>
@@ -1504,7 +1504,7 @@
               <a:rPr lang="en-US" dirty="0"/>
               <a:t>Do now — retrieval. Silent, no notes, no help: recall comes before any support. Give about four minutes.
 1. How many major tectonic plates are there?  →  7 plates
-2. Who first put forward the theory of plate tectonics, in 1912?  →  A   Alfred Wegener
+2. Who first put forward the theory of plate tectonics, in 1912?  →  B   Alfred Wegener
 3. The name for all the land on Earth when it was joined together as one piece is ___.  →  Pangaea
 Circulate: who gets 3/3 (Stretch route), 2/3 (Core), 0–1 (Support)? Use this to route pupils later in the lesson.</a:t>
             </a:r>
@@ -1596,7 +1596,7 @@
               <a:rPr lang="en-US" dirty="0"/>
               <a:t>Answers — pupils mark their own in a different colour, then hands up for 3/3, 2/3, 1/3.
 1. 7 plates. There are seven major plates: North American, South American, Eurasian, African, Indo-Australian, Pacific and Antarctic.
-2. A   Alfred Wegener. Alfred Wegener suggested in 1912 that the continents had once been joined and had drifted apart.
+2. B   Alfred Wegener. Alfred Wegener suggested in 1912 that the continents had once been joined and had drifted apart.
 3. Pangaea. Pangaea is the name given to the single landmass that later split into today's continents.
 Say the route each score points to: 3/3 Stretch, 2/3 Core, 0–1 Support. Pupils may choose to move up.</a:t>
             </a:r>
@@ -8460,7 +8460,7 @@
                 <a:ea typeface="Calibri" pitchFamily="34" charset="-122"/>
                 <a:cs typeface="Calibri" pitchFamily="34" charset="-120"/>
               </a:rPr>
-              <a:t>Along plate boundaries, where two plates meet</a:t>
+              <a:t>Only in the oceans, never on land</a:t>
             </a:r>
             <a:endParaRPr lang="en-US" sz="2400" dirty="0"/>
           </a:p>
@@ -8497,7 +8497,7 @@
                 <a:ea typeface="Calibri" pitchFamily="34" charset="-122"/>
                 <a:cs typeface="Calibri" pitchFamily="34" charset="-120"/>
               </a:rPr>
-              <a:t>In the middle of plates, far from their edges</a:t>
+              <a:t>Along plate boundaries, where two plates meet</a:t>
             </a:r>
             <a:endParaRPr lang="en-US" sz="2400" dirty="0"/>
           </a:p>
@@ -8571,7 +8571,7 @@
                 <a:ea typeface="Calibri" pitchFamily="34" charset="-122"/>
                 <a:cs typeface="Calibri" pitchFamily="34" charset="-120"/>
               </a:rPr>
-              <a:t>Only in the oceans, never on land</a:t>
+              <a:t>In the middle of plates, far from their edges</a:t>
             </a:r>
             <a:endParaRPr lang="en-US" sz="2400" dirty="0"/>
           </a:p>
@@ -10005,7 +10005,7 @@
                 <a:ea typeface="Cambria" pitchFamily="34" charset="-122"/>
                 <a:cs typeface="Cambria" pitchFamily="34" charset="-120"/>
               </a:rPr>
-              <a:t>A   Along plate boundaries, where two plates meet</a:t>
+              <a:t>B   Along plate boundaries, where two plates meet</a:t>
             </a:r>
             <a:endParaRPr lang="en-US" sz="1800" dirty="0"/>
           </a:p>
@@ -10737,7 +10737,7 @@
                 <a:ea typeface="Calibri" pitchFamily="34" charset="-122"/>
                 <a:cs typeface="Calibri" pitchFamily="34" charset="-120"/>
               </a:rPr>
-              <a:t>Alfred Wegener</a:t>
+              <a:t>Marie Curie</a:t>
             </a:r>
             <a:endParaRPr lang="en-US" sz="2400" dirty="0"/>
           </a:p>
@@ -10774,7 +10774,7 @@
                 <a:ea typeface="Calibri" pitchFamily="34" charset="-122"/>
                 <a:cs typeface="Calibri" pitchFamily="34" charset="-120"/>
               </a:rPr>
-              <a:t>Charles Darwin</a:t>
+              <a:t>Alfred Wegener</a:t>
             </a:r>
             <a:endParaRPr lang="en-US" sz="2400" dirty="0"/>
           </a:p>
@@ -10848,7 +10848,7 @@
                 <a:ea typeface="Calibri" pitchFamily="34" charset="-122"/>
                 <a:cs typeface="Calibri" pitchFamily="34" charset="-120"/>
               </a:rPr>
-              <a:t>Marie Curie</a:t>
+              <a:t>Charles Darwin</a:t>
             </a:r>
             <a:endParaRPr lang="en-US" sz="2400" dirty="0"/>
           </a:p>
@@ -11697,7 +11697,7 @@
                 <a:ea typeface="Calibri" pitchFamily="34" charset="-122"/>
                 <a:cs typeface="Calibri" pitchFamily="34" charset="-120"/>
               </a:rPr>
-              <a:t>A   Alfred Wegener</a:t>
+              <a:t>B   Alfred Wegener</a:t>
             </a:r>
             <a:endParaRPr lang="en-US" sz="2200" dirty="0"/>
           </a:p>

--- a/decks/geog-tectonics/geog-tectonics_ch2_moving-plates.pptx
+++ b/decks/geog-tectonics/geog-tectonics_ch2_moving-plates.pptx
@@ -124,29 +124,29 @@
   <p:extLst>
     <p:ext uri="{521415D9-36F7-43E2-AB2F-B90AF26B5E84}">
       <p14:sectionLst xmlns:p14="http://schemas.microsoft.com/office/powerpoint/2010/main">
-        <p14:section name="Opening" id="{16651fc7-015c-7786-9344-d9460651fba0}">
+        <p14:section name="Opening" id="{92a2bed7-6679-5fa6-a570-70b6daf36a2f}">
           <p14:sldIdLst>
             <p14:sldId id="256"/>
           </p14:sldIdLst>
         </p14:section>
-        <p14:section name="Gate" id="{18bc7173-2c79-7e2d-4228-088e60f559cd}">
+        <p14:section name="Gate" id="{09a4240a-f3a3-c849-f3f7-18783ddc880f}">
           <p14:sldIdLst>
             <p14:sldId id="257"/>
             <p14:sldId id="258"/>
           </p14:sldIdLst>
         </p14:section>
-        <p14:section name="Pre-teach" id="{ef905b8b-146d-de36-cdcc-0ab56d984953}">
+        <p14:section name="Pre-teach" id="{1543c65f-819c-e63b-bcbb-9c6710eecf44}">
           <p14:sldIdLst>
             <p14:sldId id="259"/>
           </p14:sldIdLst>
         </p14:section>
-        <p14:section name="Read-along" id="{984c87a0-c2d0-0784-ac13-16b8a59fc3d6}">
+        <p14:section name="Read-along" id="{fad25bf7-f1dd-2580-1ac2-dabc7ec93240}">
           <p14:sldIdLst>
             <p14:sldId id="260"/>
             <p14:sldId id="261"/>
           </p14:sldIdLst>
         </p14:section>
-        <p14:section name="Teach" id="{ad027fa5-9f0a-66bb-4098-d1048fba9bbc}">
+        <p14:section name="Teach" id="{c08c48b9-1e63-bce3-cec5-c375428495ee}">
           <p14:sldIdLst>
             <p14:sldId id="262"/>
             <p14:sldId id="263"/>
@@ -154,7 +154,7 @@
             <p14:sldId id="265"/>
           </p14:sldIdLst>
         </p14:section>
-        <p14:section name="Routes" id="{b43f46e8-158f-5eaa-84aa-b803fe194f08}">
+        <p14:section name="Routes" id="{7932962d-d2e8-d724-e9ee-768b2274eb9f}">
           <p14:sldIdLst>
             <p14:sldId id="266"/>
             <p14:sldId id="267"/>
@@ -162,12 +162,12 @@
             <p14:sldId id="269"/>
           </p14:sldIdLst>
         </p14:section>
-        <p14:section name="Close" id="{efcc44bd-7b10-bae6-09b7-74da7c34d209}">
+        <p14:section name="Close" id="{47c13399-8f16-3f4d-f89c-1a18c57fcf35}">
           <p14:sldIdLst>
             <p14:sldId id="270"/>
           </p14:sldIdLst>
         </p14:section>
-        <p14:section name="Answers" id="{85a4d0e1-cf19-b3ff-46b7-5c7f3e8706d7}">
+        <p14:section name="Answers" id="{ffb94479-8bad-67cf-9301-bd4ed300bc12}">
           <p14:sldIdLst>
             <p14:sldId id="271"/>
             <p14:sldId id="272"/>
